--- a/_work/figs/out/prometheus.pptx
+++ b/_work/figs/out/prometheus.pptx
@@ -7,7 +7,7 @@
   <p:sldIdLst>
     <p:sldId id="256" r:id="rId7"/>
   </p:sldIdLst>
-  <p:sldSz cx="12191695" cy="7486128" type="screen4x3"/>
+  <p:sldSz cx="12191695" cy="7632615" type="screen4x3"/>
   <p:notesSz cx="6858000" cy="9144000"/>
   <p:defaultTextStyle>
     <a:defPPr>
@@ -3096,12 +3096,12 @@
         </p:nvSpPr>
         <p:spPr>
           <a:xfrm>
-            <a:off x="374306" y="481251"/>
-            <a:ext cx="3475702" cy="909029"/>
+            <a:off x="1075737" y="430295"/>
+            <a:ext cx="3298929" cy="799119"/>
           </a:xfrm>
           <a:prstGeom prst="roundRect">
             <a:avLst>
-              <a:gd name="adj" fmla="val 8235"/>
+              <a:gd name="adj" fmla="val 8974"/>
             </a:avLst>
           </a:prstGeom>
           <a:solidFill>
@@ -3164,12 +3164,12 @@
         </p:nvSpPr>
         <p:spPr>
           <a:xfrm>
-            <a:off x="4331260" y="481251"/>
-            <a:ext cx="3475702" cy="909029"/>
+            <a:off x="4835697" y="430295"/>
+            <a:ext cx="3278439" cy="799119"/>
           </a:xfrm>
           <a:prstGeom prst="roundRect">
             <a:avLst>
-              <a:gd name="adj" fmla="val 8235"/>
+              <a:gd name="adj" fmla="val 8974"/>
             </a:avLst>
           </a:prstGeom>
           <a:solidFill>
@@ -3232,12 +3232,12 @@
         </p:nvSpPr>
         <p:spPr>
           <a:xfrm>
-            <a:off x="8288213" y="481251"/>
-            <a:ext cx="3529174" cy="909029"/>
+            <a:off x="8636637" y="430295"/>
+            <a:ext cx="3298929" cy="799119"/>
           </a:xfrm>
           <a:prstGeom prst="roundRect">
             <a:avLst>
-              <a:gd name="adj" fmla="val 8235"/>
+              <a:gd name="adj" fmla="val 8974"/>
             </a:avLst>
           </a:prstGeom>
           <a:solidFill>
@@ -3300,12 +3300,12 @@
         </p:nvSpPr>
         <p:spPr>
           <a:xfrm>
-            <a:off x="374306" y="1839448"/>
-            <a:ext cx="3475702" cy="855557"/>
+            <a:off x="1075737" y="1639219"/>
+            <a:ext cx="3298929" cy="778629"/>
           </a:xfrm>
           <a:prstGeom prst="roundRect">
             <a:avLst>
-              <a:gd name="adj" fmla="val 8750"/>
+              <a:gd name="adj" fmla="val 9210"/>
             </a:avLst>
           </a:prstGeom>
           <a:solidFill>
@@ -3368,12 +3368,12 @@
         </p:nvSpPr>
         <p:spPr>
           <a:xfrm>
-            <a:off x="4331260" y="1839448"/>
-            <a:ext cx="3475702" cy="855557"/>
+            <a:off x="4835697" y="1639219"/>
+            <a:ext cx="3278439" cy="778629"/>
           </a:xfrm>
           <a:prstGeom prst="roundRect">
             <a:avLst>
-              <a:gd name="adj" fmla="val 8750"/>
+              <a:gd name="adj" fmla="val 9210"/>
             </a:avLst>
           </a:prstGeom>
           <a:solidFill>
@@ -3436,12 +3436,12 @@
         </p:nvSpPr>
         <p:spPr>
           <a:xfrm>
-            <a:off x="8288213" y="1839448"/>
-            <a:ext cx="3529174" cy="855557"/>
+            <a:off x="8636637" y="1639219"/>
+            <a:ext cx="3298929" cy="778629"/>
           </a:xfrm>
           <a:prstGeom prst="roundRect">
             <a:avLst>
-              <a:gd name="adj" fmla="val 8750"/>
+              <a:gd name="adj" fmla="val 9210"/>
             </a:avLst>
           </a:prstGeom>
           <a:solidFill>
@@ -3504,12 +3504,12 @@
         </p:nvSpPr>
         <p:spPr>
           <a:xfrm>
-            <a:off x="374306" y="3154868"/>
-            <a:ext cx="11443082" cy="1732504"/>
+            <a:off x="1075737" y="2848143"/>
+            <a:ext cx="10859829" cy="1331865"/>
           </a:xfrm>
           <a:prstGeom prst="roundRect">
             <a:avLst>
-              <a:gd name="adj" fmla="val 4320"/>
+              <a:gd name="adj" fmla="val 5384"/>
             </a:avLst>
           </a:prstGeom>
           <a:solidFill>
@@ -3561,12 +3561,12 @@
         </p:nvSpPr>
         <p:spPr>
           <a:xfrm>
-            <a:off x="695140" y="3689591"/>
-            <a:ext cx="2299310" cy="876946"/>
+            <a:off x="1485542" y="3175987"/>
+            <a:ext cx="2253926" cy="778629"/>
           </a:xfrm>
           <a:prstGeom prst="roundRect">
             <a:avLst>
-              <a:gd name="adj" fmla="val 8536"/>
+              <a:gd name="adj" fmla="val 9210"/>
             </a:avLst>
           </a:prstGeom>
           <a:solidFill>
@@ -3598,7 +3598,7 @@
           <a:p>
             <a:pPr algn="ctr" rtl="1"/>
             <a:r>
-              <a:rPr sz="1000" b="0">
+              <a:rPr sz="980" b="0">
                 <a:solidFill>
                   <a:srgbClr val="1F3864"/>
                 </a:solidFill>
@@ -3610,7 +3610,7 @@
           <a:p>
             <a:pPr algn="ctr" rtl="1"/>
             <a:r>
-              <a:rPr sz="1000" b="0">
+              <a:rPr sz="980" b="0">
                 <a:solidFill>
                   <a:srgbClr val="1F3864"/>
                 </a:solidFill>
@@ -3629,12 +3629,12 @@
         </p:nvSpPr>
         <p:spPr>
           <a:xfrm>
-            <a:off x="3368757" y="3689591"/>
-            <a:ext cx="2513200" cy="876946"/>
+            <a:off x="4118539" y="3175987"/>
+            <a:ext cx="2561280" cy="778629"/>
           </a:xfrm>
           <a:prstGeom prst="roundRect">
             <a:avLst>
-              <a:gd name="adj" fmla="val 8536"/>
+              <a:gd name="adj" fmla="val 9210"/>
             </a:avLst>
           </a:prstGeom>
           <a:solidFill>
@@ -3666,7 +3666,7 @@
           <a:p>
             <a:pPr algn="ctr" rtl="1"/>
             <a:r>
-              <a:rPr sz="1000" b="0">
+              <a:rPr sz="980" b="0">
                 <a:solidFill>
                   <a:srgbClr val="1F3864"/>
                 </a:solidFill>
@@ -3678,7 +3678,7 @@
           <a:p>
             <a:pPr algn="ctr" rtl="1"/>
             <a:r>
-              <a:rPr sz="1000" b="0">
+              <a:rPr sz="980" b="0">
                 <a:solidFill>
                   <a:srgbClr val="1F3864"/>
                 </a:solidFill>
@@ -3697,12 +3697,12 @@
         </p:nvSpPr>
         <p:spPr>
           <a:xfrm>
-            <a:off x="6256264" y="3689591"/>
-            <a:ext cx="2620145" cy="876946"/>
+            <a:off x="6884721" y="3175987"/>
+            <a:ext cx="2458829" cy="778629"/>
           </a:xfrm>
           <a:prstGeom prst="roundRect">
             <a:avLst>
-              <a:gd name="adj" fmla="val 8536"/>
+              <a:gd name="adj" fmla="val 9210"/>
             </a:avLst>
           </a:prstGeom>
           <a:solidFill>
@@ -3734,7 +3734,7 @@
           <a:p>
             <a:pPr algn="ctr" rtl="1"/>
             <a:r>
-              <a:rPr sz="1000" b="0">
+              <a:rPr sz="980" b="0">
                 <a:solidFill>
                   <a:srgbClr val="1F3864"/>
                 </a:solidFill>
@@ -3746,7 +3746,7 @@
           <a:p>
             <a:pPr algn="ctr" rtl="1"/>
             <a:r>
-              <a:rPr sz="1000" b="0">
+              <a:rPr sz="980" b="0">
                 <a:solidFill>
                   <a:srgbClr val="1F3864"/>
                 </a:solidFill>
@@ -3765,12 +3765,12 @@
         </p:nvSpPr>
         <p:spPr>
           <a:xfrm>
-            <a:off x="9250716" y="3689591"/>
-            <a:ext cx="2245838" cy="876946"/>
+            <a:off x="9548453" y="3175987"/>
+            <a:ext cx="2079759" cy="778629"/>
           </a:xfrm>
           <a:prstGeom prst="roundRect">
             <a:avLst>
-              <a:gd name="adj" fmla="val 8536"/>
+              <a:gd name="adj" fmla="val 9210"/>
             </a:avLst>
           </a:prstGeom>
           <a:solidFill>
@@ -3802,7 +3802,7 @@
           <a:p>
             <a:pPr algn="ctr" rtl="1"/>
             <a:r>
-              <a:rPr sz="950" b="0">
+              <a:rPr sz="900" b="0">
                 <a:solidFill>
                   <a:srgbClr val="1F3864"/>
                 </a:solidFill>
@@ -3814,7 +3814,7 @@
           <a:p>
             <a:pPr algn="ctr" rtl="1"/>
             <a:r>
-              <a:rPr sz="950" b="0">
+              <a:rPr sz="900" b="0">
                 <a:solidFill>
                   <a:srgbClr val="1F3864"/>
                 </a:solidFill>
@@ -3833,12 +3833,12 @@
         </p:nvSpPr>
         <p:spPr>
           <a:xfrm>
-            <a:off x="588195" y="5368623"/>
-            <a:ext cx="3047923" cy="909029"/>
+            <a:off x="1075737" y="4528343"/>
+            <a:ext cx="4405402" cy="717158"/>
           </a:xfrm>
           <a:prstGeom prst="roundRect">
             <a:avLst>
-              <a:gd name="adj" fmla="val 8235"/>
+              <a:gd name="adj" fmla="val 10000"/>
             </a:avLst>
           </a:prstGeom>
           <a:solidFill>
@@ -3870,25 +3870,25 @@
           <a:p>
             <a:pPr algn="ctr" rtl="1"/>
             <a:r>
-              <a:rPr sz="950" b="0">
+              <a:rPr sz="980" b="0">
                 <a:solidFill>
                   <a:srgbClr val="1F3864"/>
                 </a:solidFill>
                 <a:latin typeface="Vazirmatn"/>
               </a:rPr>
-              <a:t>Alertmanager</a:t>
+              <a:t>Grafana</a:t>
             </a:r>
           </a:p>
           <a:p>
             <a:pPr algn="ctr" rtl="1"/>
             <a:r>
-              <a:rPr sz="950" b="0">
+              <a:rPr sz="980" b="0">
                 <a:solidFill>
                   <a:srgbClr val="1F3864"/>
                 </a:solidFill>
                 <a:latin typeface="Vazirmatn"/>
               </a:rPr>
-              <a:t>(مسیریابی و خاموش‌سازی هشدار)</a:t>
+              <a:t>(داشبورد عملیاتی)</a:t>
             </a:r>
           </a:p>
         </p:txBody>
@@ -3901,12 +3901,12 @@
         </p:nvSpPr>
         <p:spPr>
           <a:xfrm>
-            <a:off x="4010426" y="5368623"/>
-            <a:ext cx="3154868" cy="909029"/>
+            <a:off x="5890945" y="4528343"/>
+            <a:ext cx="6044621" cy="717158"/>
           </a:xfrm>
           <a:prstGeom prst="roundRect">
             <a:avLst>
-              <a:gd name="adj" fmla="val 8235"/>
+              <a:gd name="adj" fmla="val 10000"/>
             </a:avLst>
           </a:prstGeom>
           <a:solidFill>
@@ -3938,25 +3938,25 @@
           <a:p>
             <a:pPr algn="ctr" rtl="1"/>
             <a:r>
-              <a:rPr sz="1000" b="0">
+              <a:rPr sz="950" b="0">
                 <a:solidFill>
                   <a:srgbClr val="1F3864"/>
                 </a:solidFill>
                 <a:latin typeface="Vazirmatn"/>
               </a:rPr>
-              <a:t>Grafana</a:t>
+              <a:t>Alertmanager</a:t>
             </a:r>
           </a:p>
           <a:p>
             <a:pPr algn="ctr" rtl="1"/>
             <a:r>
-              <a:rPr sz="1000" b="0">
+              <a:rPr sz="950" b="0">
                 <a:solidFill>
                   <a:srgbClr val="1F3864"/>
                 </a:solidFill>
                 <a:latin typeface="Vazirmatn"/>
               </a:rPr>
-              <a:t>(داشبورد عملیاتی)</a:t>
+              <a:t>(مسیریابی و خاموش‌سازی هشدار)</a:t>
             </a:r>
           </a:p>
         </p:txBody>
@@ -3969,12 +3969,12 @@
         </p:nvSpPr>
         <p:spPr>
           <a:xfrm>
-            <a:off x="7539600" y="5293762"/>
-            <a:ext cx="4277787" cy="1048058"/>
+            <a:off x="5890945" y="5716778"/>
+            <a:ext cx="6044621" cy="973286"/>
           </a:xfrm>
           <a:prstGeom prst="roundRect">
             <a:avLst>
-              <a:gd name="adj" fmla="val 7142"/>
+              <a:gd name="adj" fmla="val 7368"/>
             </a:avLst>
           </a:prstGeom>
           <a:solidFill>
@@ -4037,12 +4037,12 @@
         </p:nvSpPr>
         <p:spPr>
           <a:xfrm>
-            <a:off x="588195" y="6577098"/>
-            <a:ext cx="11229192" cy="727223"/>
+            <a:off x="1075737" y="6915457"/>
+            <a:ext cx="10859829" cy="594217"/>
           </a:xfrm>
           <a:prstGeom prst="roundRect">
             <a:avLst>
-              <a:gd name="adj" fmla="val 10294"/>
+              <a:gd name="adj" fmla="val 12068"/>
             </a:avLst>
           </a:prstGeom>
           <a:solidFill>
@@ -4074,7 +4074,7 @@
           <a:p>
             <a:pPr algn="ctr" rtl="1"/>
             <a:r>
-              <a:rPr sz="1050" b="1">
+              <a:rPr sz="1000" b="1">
                 <a:solidFill>
                   <a:srgbClr val="1F3864"/>
                 </a:solidFill>
@@ -4093,8 +4093,8 @@
         </p:nvCxnSpPr>
         <p:spPr>
           <a:xfrm>
-            <a:off x="2112157" y="1390281"/>
-            <a:ext cx="0" cy="449167"/>
+            <a:off x="2725202" y="1229414"/>
+            <a:ext cx="0" cy="409805"/>
           </a:xfrm>
           <a:prstGeom prst="line">
             <a:avLst/>
@@ -4129,8 +4129,8 @@
         </p:nvCxnSpPr>
         <p:spPr>
           <a:xfrm>
-            <a:off x="6069111" y="1390281"/>
-            <a:ext cx="0" cy="235278"/>
+            <a:off x="6474917" y="1229414"/>
+            <a:ext cx="0" cy="102451"/>
           </a:xfrm>
           <a:prstGeom prst="line">
             <a:avLst/>
@@ -4164,8 +4164,8 @@
         </p:nvCxnSpPr>
         <p:spPr>
           <a:xfrm flipH="1">
-            <a:off x="2700353" y="1625559"/>
-            <a:ext cx="3368758" cy="0"/>
+            <a:off x="3278439" y="1331865"/>
+            <a:ext cx="3196478" cy="0"/>
           </a:xfrm>
           <a:prstGeom prst="line">
             <a:avLst/>
@@ -4199,8 +4199,8 @@
         </p:nvCxnSpPr>
         <p:spPr>
           <a:xfrm>
-            <a:off x="2700353" y="1625559"/>
-            <a:ext cx="0" cy="213889"/>
+            <a:off x="3278439" y="1331865"/>
+            <a:ext cx="0" cy="307354"/>
           </a:xfrm>
           <a:prstGeom prst="line">
             <a:avLst/>
@@ -4235,8 +4235,8 @@
         </p:nvCxnSpPr>
         <p:spPr>
           <a:xfrm>
-            <a:off x="10052801" y="1390281"/>
-            <a:ext cx="0" cy="449167"/>
+            <a:off x="10286102" y="1229414"/>
+            <a:ext cx="0" cy="409805"/>
           </a:xfrm>
           <a:prstGeom prst="line">
             <a:avLst/>
@@ -4271,8 +4271,8 @@
         </p:nvCxnSpPr>
         <p:spPr>
           <a:xfrm>
-            <a:off x="2112157" y="2695006"/>
-            <a:ext cx="0" cy="213889"/>
+            <a:off x="2725202" y="2417848"/>
+            <a:ext cx="0" cy="758139"/>
           </a:xfrm>
           <a:prstGeom prst="line">
             <a:avLst/>
@@ -4281,6 +4281,7 @@
             <a:solidFill>
               <a:srgbClr val="2F5597"/>
             </a:solidFill>
+            <a:tailEnd type="triangle" w="med" len="med"/>
           </a:ln>
         </p:spPr>
         <p:style>
@@ -4306,8 +4307,8 @@
         </p:nvCxnSpPr>
         <p:spPr>
           <a:xfrm>
-            <a:off x="2112157" y="2908895"/>
-            <a:ext cx="53473" cy="0"/>
+            <a:off x="6474917" y="2417848"/>
+            <a:ext cx="0" cy="758139"/>
           </a:xfrm>
           <a:prstGeom prst="line">
             <a:avLst/>
@@ -4316,6 +4317,8 @@
             <a:solidFill>
               <a:srgbClr val="2F5597"/>
             </a:solidFill>
+            <a:prstDash val="dash"/>
+            <a:tailEnd type="triangle" w="med" len="med"/>
           </a:ln>
         </p:spPr>
         <p:style>
@@ -4341,8 +4344,8 @@
         </p:nvCxnSpPr>
         <p:spPr>
           <a:xfrm>
-            <a:off x="2165630" y="2908895"/>
-            <a:ext cx="0" cy="780696"/>
+            <a:off x="10286102" y="2417848"/>
+            <a:ext cx="0" cy="758139"/>
           </a:xfrm>
           <a:prstGeom prst="line">
             <a:avLst/>
@@ -4377,16 +4380,17 @@
         </p:nvCxnSpPr>
         <p:spPr>
           <a:xfrm>
-            <a:off x="10052801" y="2695006"/>
-            <a:ext cx="0" cy="213889"/>
+            <a:off x="3739469" y="3565302"/>
+            <a:ext cx="379070" cy="0"/>
           </a:xfrm>
           <a:prstGeom prst="line">
             <a:avLst/>
           </a:prstGeom>
-          <a:ln w="20320">
+          <a:ln w="16510">
             <a:solidFill>
               <a:srgbClr val="2F5597"/>
             </a:solidFill>
+            <a:tailEnd type="triangle" w="med" len="med"/>
           </a:ln>
         </p:spPr>
         <p:style>
@@ -4411,17 +4415,18 @@
           <p:nvPr/>
         </p:nvCxnSpPr>
         <p:spPr>
-          <a:xfrm flipH="1">
-            <a:off x="5427443" y="2908895"/>
-            <a:ext cx="4625358" cy="0"/>
+          <a:xfrm>
+            <a:off x="6679819" y="3565302"/>
+            <a:ext cx="204902" cy="0"/>
           </a:xfrm>
           <a:prstGeom prst="line">
             <a:avLst/>
           </a:prstGeom>
-          <a:ln w="20320">
+          <a:ln w="16510">
             <a:solidFill>
               <a:srgbClr val="2F5597"/>
             </a:solidFill>
+            <a:tailEnd type="triangle" w="med" len="med"/>
           </a:ln>
         </p:spPr>
         <p:style>
@@ -4447,13 +4452,13 @@
         </p:nvCxnSpPr>
         <p:spPr>
           <a:xfrm>
-            <a:off x="5427443" y="2908895"/>
-            <a:ext cx="0" cy="780696"/>
+            <a:off x="9343551" y="3565302"/>
+            <a:ext cx="204902" cy="0"/>
           </a:xfrm>
           <a:prstGeom prst="line">
             <a:avLst/>
           </a:prstGeom>
-          <a:ln w="20320">
+          <a:ln w="16510">
             <a:solidFill>
               <a:srgbClr val="2F5597"/>
             </a:solidFill>
@@ -4483,8 +4488,8 @@
         </p:nvCxnSpPr>
         <p:spPr>
           <a:xfrm>
-            <a:off x="6069111" y="2695006"/>
-            <a:ext cx="0" cy="213889"/>
+            <a:off x="8114136" y="3954617"/>
+            <a:ext cx="0" cy="368824"/>
           </a:xfrm>
           <a:prstGeom prst="line">
             <a:avLst/>
@@ -4517,9 +4522,9 @@
           <p:nvPr/>
         </p:nvCxnSpPr>
         <p:spPr>
-          <a:xfrm>
-            <a:off x="6069111" y="2908895"/>
-            <a:ext cx="1497226" cy="0"/>
+          <a:xfrm flipH="1">
+            <a:off x="3278439" y="4323441"/>
+            <a:ext cx="4835697" cy="0"/>
           </a:xfrm>
           <a:prstGeom prst="line">
             <a:avLst/>
@@ -4553,8 +4558,8 @@
         </p:nvCxnSpPr>
         <p:spPr>
           <a:xfrm>
-            <a:off x="7566337" y="2908895"/>
-            <a:ext cx="0" cy="780696"/>
+            <a:off x="3278439" y="4323441"/>
+            <a:ext cx="0" cy="204902"/>
           </a:xfrm>
           <a:prstGeom prst="line">
             <a:avLst/>
@@ -4563,7 +4568,6 @@
             <a:solidFill>
               <a:srgbClr val="2F5597"/>
             </a:solidFill>
-            <a:prstDash val="dash"/>
             <a:tailEnd type="triangle" w="med" len="med"/>
           </a:ln>
         </p:spPr>
@@ -4590,8 +4594,8 @@
         </p:nvCxnSpPr>
         <p:spPr>
           <a:xfrm>
-            <a:off x="10373635" y="4566538"/>
-            <a:ext cx="0" cy="417084"/>
+            <a:off x="10588333" y="3954617"/>
+            <a:ext cx="0" cy="368824"/>
           </a:xfrm>
           <a:prstGeom prst="line">
             <a:avLst/>
@@ -4625,8 +4629,8 @@
         </p:nvCxnSpPr>
         <p:spPr>
           <a:xfrm flipH="1">
-            <a:off x="2112157" y="4983622"/>
-            <a:ext cx="8261478" cy="0"/>
+            <a:off x="8913256" y="4323441"/>
+            <a:ext cx="1675077" cy="0"/>
           </a:xfrm>
           <a:prstGeom prst="line">
             <a:avLst/>
@@ -4660,8 +4664,8 @@
         </p:nvCxnSpPr>
         <p:spPr>
           <a:xfrm>
-            <a:off x="2112157" y="4983622"/>
-            <a:ext cx="0" cy="385001"/>
+            <a:off x="8913256" y="4323441"/>
+            <a:ext cx="0" cy="204902"/>
           </a:xfrm>
           <a:prstGeom prst="line">
             <a:avLst/>
@@ -4696,8 +4700,8 @@
         </p:nvCxnSpPr>
         <p:spPr>
           <a:xfrm>
-            <a:off x="7192030" y="4566538"/>
-            <a:ext cx="0" cy="245973"/>
+            <a:off x="8913256" y="5245502"/>
+            <a:ext cx="0" cy="471276"/>
           </a:xfrm>
           <a:prstGeom prst="line">
             <a:avLst/>
@@ -4706,6 +4710,7 @@
             <a:solidFill>
               <a:srgbClr val="2F5597"/>
             </a:solidFill>
+            <a:tailEnd type="triangle" w="med" len="med"/>
           </a:ln>
         </p:spPr>
         <p:style>
@@ -4731,13 +4736,13 @@
         </p:nvCxnSpPr>
         <p:spPr>
           <a:xfrm flipH="1">
-            <a:off x="5587860" y="4812511"/>
-            <a:ext cx="1604170" cy="0"/>
+            <a:off x="5686042" y="6044621"/>
+            <a:ext cx="204903" cy="0"/>
           </a:xfrm>
           <a:prstGeom prst="line">
             <a:avLst/>
           </a:prstGeom>
-          <a:ln w="20320">
+          <a:ln w="17780">
             <a:solidFill>
               <a:srgbClr val="2F5597"/>
             </a:solidFill>
@@ -4765,17 +4770,18 @@
           <p:nvPr/>
         </p:nvCxnSpPr>
         <p:spPr>
-          <a:xfrm>
-            <a:off x="5587860" y="4812511"/>
-            <a:ext cx="0" cy="556112"/>
+          <a:xfrm flipV="1">
+            <a:off x="5686042" y="4180009"/>
+            <a:ext cx="0" cy="1864612"/>
           </a:xfrm>
           <a:prstGeom prst="line">
             <a:avLst/>
           </a:prstGeom>
-          <a:ln w="20320">
+          <a:ln w="17780">
             <a:solidFill>
               <a:srgbClr val="2F5597"/>
             </a:solidFill>
+            <a:prstDash val="dash"/>
             <a:tailEnd type="triangle" w="med" len="med"/>
           </a:ln>
         </p:spPr>
@@ -4802,8 +4808,8 @@
         </p:nvCxnSpPr>
         <p:spPr>
           <a:xfrm>
-            <a:off x="8154532" y="4566538"/>
-            <a:ext cx="0" cy="588196"/>
+            <a:off x="8913256" y="6690064"/>
+            <a:ext cx="0" cy="225393"/>
           </a:xfrm>
           <a:prstGeom prst="line">
             <a:avLst/>
@@ -4812,6 +4818,7 @@
             <a:solidFill>
               <a:srgbClr val="2F5597"/>
             </a:solidFill>
+            <a:tailEnd type="triangle" w="med" len="med"/>
           </a:ln>
         </p:spPr>
         <p:style>
@@ -4836,14 +4843,14 @@
           <p:nvPr/>
         </p:nvCxnSpPr>
         <p:spPr>
-          <a:xfrm>
-            <a:off x="8154532" y="5154734"/>
-            <a:ext cx="1523962" cy="0"/>
+          <a:xfrm flipH="1">
+            <a:off x="881080" y="7212565"/>
+            <a:ext cx="194657" cy="0"/>
           </a:xfrm>
           <a:prstGeom prst="line">
             <a:avLst/>
           </a:prstGeom>
-          <a:ln w="20320">
+          <a:ln w="17780">
             <a:solidFill>
               <a:srgbClr val="2F5597"/>
             </a:solidFill>
@@ -4871,18 +4878,17 @@
           <p:nvPr/>
         </p:nvCxnSpPr>
         <p:spPr>
-          <a:xfrm>
-            <a:off x="9678494" y="5154734"/>
-            <a:ext cx="0" cy="139028"/>
+          <a:xfrm flipV="1">
+            <a:off x="881080" y="829854"/>
+            <a:ext cx="0" cy="6382711"/>
           </a:xfrm>
           <a:prstGeom prst="line">
             <a:avLst/>
           </a:prstGeom>
-          <a:ln w="20320">
+          <a:ln w="17780">
             <a:solidFill>
               <a:srgbClr val="2F5597"/>
             </a:solidFill>
-            <a:tailEnd type="triangle" w="med" len="med"/>
           </a:ln>
         </p:spPr>
         <p:style>
@@ -4908,8 +4914,8 @@
         </p:nvCxnSpPr>
         <p:spPr>
           <a:xfrm>
-            <a:off x="2112157" y="6277653"/>
-            <a:ext cx="0" cy="181806"/>
+            <a:off x="881080" y="829854"/>
+            <a:ext cx="194657" cy="0"/>
           </a:xfrm>
           <a:prstGeom prst="line">
             <a:avLst/>
@@ -4918,6 +4924,8 @@
             <a:solidFill>
               <a:srgbClr val="2F5597"/>
             </a:solidFill>
+            <a:prstDash val="dash"/>
+            <a:tailEnd type="triangle" w="med" len="med"/>
           </a:ln>
         </p:spPr>
         <p:style>
@@ -4943,16 +4951,17 @@
         </p:nvCxnSpPr>
         <p:spPr>
           <a:xfrm>
-            <a:off x="2112157" y="6459459"/>
-            <a:ext cx="6336473" cy="0"/>
+            <a:off x="143431" y="1475297"/>
+            <a:ext cx="11904832" cy="0"/>
           </a:xfrm>
           <a:prstGeom prst="line">
             <a:avLst/>
           </a:prstGeom>
-          <a:ln w="17780">
+          <a:ln w="13970">
             <a:solidFill>
-              <a:srgbClr val="2F5597"/>
+              <a:srgbClr val="8C8C8C"/>
             </a:solidFill>
+            <a:prstDash val="dash"/>
           </a:ln>
         </p:spPr>
         <p:style>
@@ -4977,18 +4986,18 @@
           <p:nvPr/>
         </p:nvCxnSpPr>
         <p:spPr>
-          <a:xfrm flipV="1">
-            <a:off x="8448630" y="6341820"/>
-            <a:ext cx="0" cy="117639"/>
+          <a:xfrm>
+            <a:off x="143431" y="5368443"/>
+            <a:ext cx="11904832" cy="0"/>
           </a:xfrm>
           <a:prstGeom prst="line">
             <a:avLst/>
           </a:prstGeom>
-          <a:ln w="17780">
+          <a:ln w="13970">
             <a:solidFill>
-              <a:srgbClr val="2F5597"/>
+              <a:srgbClr val="8C8C8C"/>
             </a:solidFill>
-            <a:tailEnd type="triangle" w="med" len="med"/>
+            <a:prstDash val="dash"/>
           </a:ln>
         </p:spPr>
         <p:style>
@@ -5006,159 +5015,16 @@
           </a:fontRef>
         </p:style>
       </p:cxnSp>
-      <p:cxnSp>
-        <p:nvCxnSpPr>
-          <p:cNvPr id="43" name="Connector 42"/>
-          <p:cNvCxnSpPr/>
-          <p:nvPr/>
-        </p:nvCxnSpPr>
-        <p:spPr>
-          <a:xfrm>
-            <a:off x="9678494" y="6341820"/>
-            <a:ext cx="0" cy="235278"/>
-          </a:xfrm>
-          <a:prstGeom prst="line">
-            <a:avLst/>
-          </a:prstGeom>
-          <a:ln w="20320">
-            <a:solidFill>
-              <a:srgbClr val="2F5597"/>
-            </a:solidFill>
-            <a:tailEnd type="triangle" w="med" len="med"/>
-          </a:ln>
-        </p:spPr>
-        <p:style>
-          <a:lnRef idx="2">
-            <a:schemeClr val="accent1"/>
-          </a:lnRef>
-          <a:fillRef idx="0">
-            <a:schemeClr val="accent1"/>
-          </a:fillRef>
-          <a:effectRef idx="1">
-            <a:schemeClr val="accent1"/>
-          </a:effectRef>
-          <a:fontRef idx="minor">
-            <a:schemeClr val="tx1"/>
-          </a:fontRef>
-        </p:style>
-      </p:cxnSp>
-      <p:cxnSp>
-        <p:nvCxnSpPr>
-          <p:cNvPr id="44" name="Connector 43"/>
-          <p:cNvCxnSpPr/>
-          <p:nvPr/>
-        </p:nvCxnSpPr>
-        <p:spPr>
-          <a:xfrm flipH="1">
-            <a:off x="128333" y="6940710"/>
-            <a:ext cx="459862" cy="0"/>
-          </a:xfrm>
-          <a:prstGeom prst="line">
-            <a:avLst/>
-          </a:prstGeom>
-          <a:ln w="20320">
-            <a:solidFill>
-              <a:srgbClr val="2F5597"/>
-            </a:solidFill>
-          </a:ln>
-        </p:spPr>
-        <p:style>
-          <a:lnRef idx="2">
-            <a:schemeClr val="accent1"/>
-          </a:lnRef>
-          <a:fillRef idx="0">
-            <a:schemeClr val="accent1"/>
-          </a:fillRef>
-          <a:effectRef idx="1">
-            <a:schemeClr val="accent1"/>
-          </a:effectRef>
-          <a:fontRef idx="minor">
-            <a:schemeClr val="tx1"/>
-          </a:fontRef>
-        </p:style>
-      </p:cxnSp>
-      <p:cxnSp>
-        <p:nvCxnSpPr>
-          <p:cNvPr id="45" name="Connector 44"/>
-          <p:cNvCxnSpPr/>
-          <p:nvPr/>
-        </p:nvCxnSpPr>
-        <p:spPr>
-          <a:xfrm flipV="1">
-            <a:off x="128333" y="935766"/>
-            <a:ext cx="0" cy="6004944"/>
-          </a:xfrm>
-          <a:prstGeom prst="line">
-            <a:avLst/>
-          </a:prstGeom>
-          <a:ln w="20320">
-            <a:solidFill>
-              <a:srgbClr val="2F5597"/>
-            </a:solidFill>
-          </a:ln>
-        </p:spPr>
-        <p:style>
-          <a:lnRef idx="2">
-            <a:schemeClr val="accent1"/>
-          </a:lnRef>
-          <a:fillRef idx="0">
-            <a:schemeClr val="accent1"/>
-          </a:fillRef>
-          <a:effectRef idx="1">
-            <a:schemeClr val="accent1"/>
-          </a:effectRef>
-          <a:fontRef idx="minor">
-            <a:schemeClr val="tx1"/>
-          </a:fontRef>
-        </p:style>
-      </p:cxnSp>
-      <p:cxnSp>
-        <p:nvCxnSpPr>
-          <p:cNvPr id="46" name="Connector 45"/>
-          <p:cNvCxnSpPr/>
-          <p:nvPr/>
-        </p:nvCxnSpPr>
-        <p:spPr>
-          <a:xfrm>
-            <a:off x="128333" y="935766"/>
-            <a:ext cx="245973" cy="0"/>
-          </a:xfrm>
-          <a:prstGeom prst="line">
-            <a:avLst/>
-          </a:prstGeom>
-          <a:ln w="20320">
-            <a:solidFill>
-              <a:srgbClr val="2F5597"/>
-            </a:solidFill>
-            <a:prstDash val="dash"/>
-            <a:tailEnd type="triangle" w="med" len="med"/>
-          </a:ln>
-        </p:spPr>
-        <p:style>
-          <a:lnRef idx="2">
-            <a:schemeClr val="accent1"/>
-          </a:lnRef>
-          <a:fillRef idx="0">
-            <a:schemeClr val="accent1"/>
-          </a:fillRef>
-          <a:effectRef idx="1">
-            <a:schemeClr val="accent1"/>
-          </a:effectRef>
-          <a:fontRef idx="minor">
-            <a:schemeClr val="tx1"/>
-          </a:fontRef>
-        </p:style>
-      </p:cxnSp>
-      <p:sp>
-        <p:nvSpPr>
-          <p:cNvPr id="47" name="TextBox 46"/>
+      <p:sp>
+        <p:nvSpPr>
+          <p:cNvPr id="43" name="TextBox 42"/>
           <p:cNvSpPr txBox="1"/>
           <p:nvPr/>
         </p:nvSpPr>
         <p:spPr>
-          <a:xfrm>
-            <a:off x="5561124" y="3165562"/>
-            <a:ext cx="1069446" cy="427778"/>
+          <a:xfrm rot="16200000">
+            <a:off x="-425172" y="665932"/>
+            <a:ext cx="1792896" cy="430295"/>
           </a:xfrm>
           <a:prstGeom prst="rect">
             <a:avLst/>
@@ -5173,27 +5039,39 @@
           <a:p>
             <a:pPr algn="ctr"/>
             <a:r>
-              <a:rPr sz="1100" b="1">
+              <a:rPr sz="919" b="1">
                 <a:solidFill>
                   <a:srgbClr val="1F3864"/>
                 </a:solidFill>
                 <a:latin typeface="Vazirmatn"/>
               </a:rPr>
-              <a:t>سرور پرومتئوس (Prometheus Server)</a:t>
-            </a:r>
-          </a:p>
-        </p:txBody>
-      </p:sp>
-      <p:sp>
-        <p:nvSpPr>
-          <p:cNvPr id="48" name="TextBox 47"/>
+              <a:t>۱.</a:t>
+            </a:r>
+          </a:p>
+          <a:p>
+            <a:pPr algn="ctr"/>
+            <a:r>
+              <a:rPr sz="919" b="1">
+                <a:solidFill>
+                  <a:srgbClr val="1F3864"/>
+                </a:solidFill>
+                <a:latin typeface="Vazirmatn"/>
+              </a:rPr>
+              <a:t>مشخصات سامانه</a:t>
+            </a:r>
+          </a:p>
+        </p:txBody>
+      </p:sp>
+      <p:sp>
+        <p:nvSpPr>
+          <p:cNvPr id="44" name="TextBox 43"/>
           <p:cNvSpPr txBox="1"/>
           <p:nvPr/>
         </p:nvSpPr>
         <p:spPr>
-          <a:xfrm>
-            <a:off x="4331260" y="2844728"/>
-            <a:ext cx="1069446" cy="427778"/>
+          <a:xfrm rot="16200000">
+            <a:off x="-425172" y="3165742"/>
+            <a:ext cx="1792896" cy="430295"/>
           </a:xfrm>
           <a:prstGeom prst="rect">
             <a:avLst/>
@@ -5208,27 +5086,39 @@
           <a:p>
             <a:pPr algn="ctr"/>
             <a:r>
-              <a:rPr sz="950" b="0">
-                <a:solidFill>
-                  <a:srgbClr val="2F5597"/>
+              <a:rPr sz="919" b="1">
+                <a:solidFill>
+                  <a:srgbClr val="1F3864"/>
                 </a:solidFill>
                 <a:latin typeface="Vazirmatn"/>
               </a:rPr>
-              <a:t>remote write</a:t>
-            </a:r>
-          </a:p>
-        </p:txBody>
-      </p:sp>
-      <p:sp>
-        <p:nvSpPr>
-          <p:cNvPr id="49" name="TextBox 48"/>
+              <a:t>۲.</a:t>
+            </a:r>
+          </a:p>
+          <a:p>
+            <a:pPr algn="ctr"/>
+            <a:r>
+              <a:rPr sz="919" b="1">
+                <a:solidFill>
+                  <a:srgbClr val="1F3864"/>
+                </a:solidFill>
+                <a:latin typeface="Vazirmatn"/>
+              </a:rPr>
+              <a:t>طراحی معماری</a:t>
+            </a:r>
+          </a:p>
+        </p:txBody>
+      </p:sp>
+      <p:sp>
+        <p:nvSpPr>
+          <p:cNvPr id="45" name="TextBox 44"/>
           <p:cNvSpPr txBox="1"/>
           <p:nvPr/>
         </p:nvSpPr>
         <p:spPr>
-          <a:xfrm>
-            <a:off x="128333" y="4983622"/>
-            <a:ext cx="1069446" cy="427778"/>
+          <a:xfrm rot="16200000">
+            <a:off x="-425172" y="6280259"/>
+            <a:ext cx="1792896" cy="430295"/>
           </a:xfrm>
           <a:prstGeom prst="rect">
             <a:avLst/>
@@ -5243,27 +5133,39 @@
           <a:p>
             <a:pPr algn="ctr"/>
             <a:r>
-              <a:rPr sz="950" b="0">
-                <a:solidFill>
-                  <a:srgbClr val="2F5597"/>
+              <a:rPr sz="919" b="1">
+                <a:solidFill>
+                  <a:srgbClr val="1F3864"/>
                 </a:solidFill>
                 <a:latin typeface="Vazirmatn"/>
               </a:rPr>
-              <a:t>بازخورد</a:t>
-            </a:r>
-          </a:p>
-        </p:txBody>
-      </p:sp>
-      <p:sp>
-        <p:nvSpPr>
-          <p:cNvPr id="50" name="TextBox 49"/>
+              <a:t>۳.</a:t>
+            </a:r>
+          </a:p>
+          <a:p>
+            <a:pPr algn="ctr"/>
+            <a:r>
+              <a:rPr sz="919" b="1">
+                <a:solidFill>
+                  <a:srgbClr val="1F3864"/>
+                </a:solidFill>
+                <a:latin typeface="Vazirmatn"/>
+              </a:rPr>
+              <a:t>طراحی تفصیلی</a:t>
+            </a:r>
+          </a:p>
+        </p:txBody>
+      </p:sp>
+      <p:sp>
+        <p:nvSpPr>
+          <p:cNvPr id="46" name="TextBox 45"/>
           <p:cNvSpPr txBox="1"/>
           <p:nvPr/>
         </p:nvSpPr>
         <p:spPr>
           <a:xfrm>
-            <a:off x="9753356" y="6234875"/>
-            <a:ext cx="1069446" cy="427778"/>
+            <a:off x="5993396" y="2796918"/>
+            <a:ext cx="1024512" cy="409804"/>
           </a:xfrm>
           <a:prstGeom prst="rect">
             <a:avLst/>
@@ -5278,13 +5180,118 @@
           <a:p>
             <a:pPr algn="ctr"/>
             <a:r>
-              <a:rPr sz="950" b="0">
+              <a:rPr sz="1100" b="1">
                 <a:solidFill>
                   <a:srgbClr val="2F5597"/>
                 </a:solidFill>
                 <a:latin typeface="Vazirmatn"/>
               </a:rPr>
-              <a:t>تصمیم</a:t>
+              <a:t>سرور پرومتئوس (Prometheus Server)</a:t>
+            </a:r>
+          </a:p>
+        </p:txBody>
+      </p:sp>
+      <p:sp>
+        <p:nvSpPr>
+          <p:cNvPr id="47" name="TextBox 46"/>
+          <p:cNvSpPr txBox="1"/>
+          <p:nvPr/>
+        </p:nvSpPr>
+        <p:spPr>
+          <a:xfrm>
+            <a:off x="6864231" y="2417848"/>
+            <a:ext cx="1024512" cy="409804"/>
+          </a:xfrm>
+          <a:prstGeom prst="rect">
+            <a:avLst/>
+          </a:prstGeom>
+          <a:noFill/>
+        </p:spPr>
+        <p:txBody>
+          <a:bodyPr wrap="none">
+            <a:spAutoFit/>
+          </a:bodyPr>
+          <a:lstStyle/>
+          <a:p>
+            <a:pPr algn="ctr"/>
+            <a:r>
+              <a:rPr sz="850" b="0">
+                <a:solidFill>
+                  <a:srgbClr val="2F5597"/>
+                </a:solidFill>
+                <a:latin typeface="Vazirmatn"/>
+              </a:rPr>
+              <a:t>remote write</a:t>
+            </a:r>
+          </a:p>
+        </p:txBody>
+      </p:sp>
+      <p:sp>
+        <p:nvSpPr>
+          <p:cNvPr id="48" name="TextBox 47"/>
+          <p:cNvSpPr txBox="1"/>
+          <p:nvPr/>
+        </p:nvSpPr>
+        <p:spPr>
+          <a:xfrm>
+            <a:off x="7735067" y="5286482"/>
+            <a:ext cx="1024512" cy="409804"/>
+          </a:xfrm>
+          <a:prstGeom prst="rect">
+            <a:avLst/>
+          </a:prstGeom>
+          <a:noFill/>
+        </p:spPr>
+        <p:txBody>
+          <a:bodyPr wrap="none">
+            <a:spAutoFit/>
+          </a:bodyPr>
+          <a:lstStyle/>
+          <a:p>
+            <a:pPr algn="ctr"/>
+            <a:r>
+              <a:rPr sz="880" b="0">
+                <a:solidFill>
+                  <a:srgbClr val="2F5597"/>
+                </a:solidFill>
+                <a:latin typeface="Vazirmatn"/>
+              </a:rPr>
+              <a:t>هشدار</a:t>
+            </a:r>
+          </a:p>
+        </p:txBody>
+      </p:sp>
+      <p:sp>
+        <p:nvSpPr>
+          <p:cNvPr id="49" name="TextBox 48"/>
+          <p:cNvSpPr txBox="1"/>
+          <p:nvPr/>
+        </p:nvSpPr>
+        <p:spPr>
+          <a:xfrm rot="16200000">
+            <a:off x="-251005" y="1936328"/>
+            <a:ext cx="1792896" cy="430295"/>
+          </a:xfrm>
+          <a:prstGeom prst="rect">
+            <a:avLst/>
+          </a:prstGeom>
+          <a:noFill/>
+        </p:spPr>
+        <p:txBody>
+          <a:bodyPr wrap="none">
+            <a:spAutoFit/>
+          </a:bodyPr>
+          <a:lstStyle/>
+          <a:p>
+            <a:pPr algn="ctr"/>
+            <a:r>
+              <a:rPr sz="860" b="0">
+                <a:solidFill>
+                  <a:srgbClr val="2F5597"/>
+                </a:solidFill>
+                <a:latin typeface="Vazirmatn"/>
+              </a:rPr>
+              <a:t>بازخورد</a:t>
             </a:r>
           </a:p>
         </p:txBody>
